--- a/2024/2024-05-03-AI-Updates.pptx
+++ b/2024/2024-05-03-AI-Updates.pptx
@@ -13260,7 +13260,7 @@
                 <a:cs typeface="Calibri"/>
                 <a:sym typeface="Calibri"/>
               </a:rPr>
-              <a:t>Germany: Der Erste Mai is an ancient festival to welcome the spring weather and to drive away evil spirits</a:t>
+              <a:t>Germany: Der Erste Mai is an ancient festival to welcome the Spring weather and to drive away evil spirits</a:t>
             </a:r>
             <a:endParaRPr sz="1300">
               <a:solidFill>
@@ -17458,7 +17458,7 @@
         </p:blipFill>
         <p:spPr>
           <a:xfrm>
-            <a:off x="7362607" y="135200"/>
+            <a:off x="5445557" y="484250"/>
             <a:ext cx="1571450" cy="1890900"/>
           </a:xfrm>
           <a:prstGeom prst="rect">
@@ -18675,7 +18675,7 @@
                 <a:cs typeface="Calibri"/>
                 <a:sym typeface="Calibri"/>
               </a:rPr>
-              <a:t>Open Source Growth 2029-2013</a:t>
+              <a:t>Open Source Growth 2019-2023</a:t>
             </a:r>
             <a:endParaRPr sz="2000" b="1" i="0" u="none" strike="noStrike" cap="none">
               <a:solidFill>
